--- a/classes/parte-11-devsecops-y-seguridad-del-sdlc/243-imagenes-y-contenedores-seguros-en-el-pipeline/clase-243-presentacion.pptx
+++ b/classes/parte-11-devsecops-y-seguridad-del-sdlc/243-imagenes-y-contenedores-seguros-en-el-pipeline/clase-243-presentacion.pptx
@@ -17,6 +17,10 @@
     <p:sldId id="265" r:id="rId16"/>
     <p:sldId id="266" r:id="rId17"/>
     <p:sldId id="267" r:id="rId18"/>
+    <p:sldId id="268" r:id="rId19"/>
+    <p:sldId id="269" r:id="rId20"/>
+    <p:sldId id="270" r:id="rId21"/>
+    <p:sldId id="271" r:id="rId22"/>
   </p:sldIdLst>
   <p:sldSz cx="9144000" cy="6858000" type="screen4x3"/>
   <p:notesSz cx="6858000" cy="9144000"/>
@@ -3198,7 +3202,7 @@
                   <a:srgbClr val="0B3D2E"/>
                 </a:solidFill>
               </a:rPr>
-              <a:t>⚠️ Errores comunes</a:t>
+              <a:t>🧪 Laboratorio guiado</a:t>
             </a:r>
           </a:p>
         </p:txBody>
@@ -3236,67 +3240,97 @@
                   <a:srgbClr val="22282E"/>
                 </a:solidFill>
               </a:rPr>
-              <a:t>•  Imagen de 1.2 GB con cientos de CVE — Base pesada y build en una etapa. Usa multi-stage + distroless/alpine.</a:t>
-            </a:r>
-          </a:p>
-          <a:p>
-            <a:pPr>
-              <a:spcAft>
-                <a:spcPts val="600"/>
-              </a:spcAft>
-            </a:pPr>
-            <a:r>
-              <a:rPr sz="1500">
-                <a:solidFill>
-                  <a:srgbClr val="22282E"/>
-                </a:solidFill>
-              </a:rPr>
-              <a:t>•  El contenedor corre como root — No definiste USER. Añade un usuario no-root o usa base :nonroot.</a:t>
-            </a:r>
-          </a:p>
-          <a:p>
-            <a:pPr>
-              <a:spcAft>
-                <a:spcPts val="600"/>
-              </a:spcAft>
-            </a:pPr>
-            <a:r>
-              <a:rPr sz="1500">
-                <a:solidFill>
-                  <a:srgbClr val="22282E"/>
-                </a:solidFill>
-              </a:rPr>
-              <a:t>•  cosign verify falla — Identidad/issuer no coinciden. Ajusta --certificate-identity al del firmante real.</a:t>
-            </a:r>
-          </a:p>
-          <a:p>
-            <a:pPr>
-              <a:spcAft>
-                <a:spcPts val="600"/>
-              </a:spcAft>
-            </a:pPr>
-            <a:r>
-              <a:rPr sz="1500">
-                <a:solidFill>
-                  <a:srgbClr val="22282E"/>
-                </a:solidFill>
-              </a:rPr>
-              <a:t>•  Trivy reporta CVE sin fix disponible — No hay parche aún. Documenta como riesgo aceptado/VEX y monitoriza.</a:t>
-            </a:r>
-          </a:p>
-          <a:p>
-            <a:pPr>
-              <a:spcAft>
-                <a:spcPts val="600"/>
-              </a:spcAft>
-            </a:pPr>
-            <a:r>
-              <a:rPr sz="1500">
-                <a:solidFill>
-                  <a:srgbClr val="22282E"/>
-                </a:solidFill>
-              </a:rPr>
-              <a:t>•  La imagen firmada se puede sustituir por otra — Firmaste el tag, no el digest. Firma y despliega por digest inmutable.</a:t>
+              <a:t>•  Parte de un Dockerfile "malo" (imagen base pesada, root, sin pin) y lintéalo:</a:t>
+            </a:r>
+          </a:p>
+          <a:p>
+            <a:pPr>
+              <a:spcAft>
+                <a:spcPts val="600"/>
+              </a:spcAft>
+            </a:pPr>
+            <a:r>
+              <a:rPr sz="1500">
+                <a:solidFill>
+                  <a:srgbClr val="22282E"/>
+                </a:solidFill>
+              </a:rPr>
+              <a:t>•  Reescríbelo seguro con multi-stage, base distroless y usuario no-root:</a:t>
+            </a:r>
+          </a:p>
+          <a:p>
+            <a:pPr>
+              <a:spcAft>
+                <a:spcPts val="600"/>
+              </a:spcAft>
+            </a:pPr>
+            <a:r>
+              <a:rPr sz="1500">
+                <a:solidFill>
+                  <a:srgbClr val="22282E"/>
+                </a:solidFill>
+              </a:rPr>
+              <a:t>•  Escanea la imagen resultante y compárala con la original:</a:t>
+            </a:r>
+          </a:p>
+          <a:p>
+            <a:pPr>
+              <a:spcAft>
+                <a:spcPts val="600"/>
+              </a:spcAft>
+            </a:pPr>
+            <a:r>
+              <a:rPr sz="1500">
+                <a:solidFill>
+                  <a:srgbClr val="22282E"/>
+                </a:solidFill>
+              </a:rPr>
+              <a:t>•  Observa la caída de CVE al usar distroless.</a:t>
+            </a:r>
+          </a:p>
+          <a:p>
+            <a:pPr>
+              <a:spcAft>
+                <a:spcPts val="600"/>
+              </a:spcAft>
+            </a:pPr>
+            <a:r>
+              <a:rPr sz="1500">
+                <a:solidFill>
+                  <a:srgbClr val="22282E"/>
+                </a:solidFill>
+              </a:rPr>
+              <a:t>•  Firma la imagen con cosign (keyless):</a:t>
+            </a:r>
+          </a:p>
+          <a:p>
+            <a:pPr>
+              <a:spcAft>
+                <a:spcPts val="600"/>
+              </a:spcAft>
+            </a:pPr>
+            <a:r>
+              <a:rPr sz="1500">
+                <a:solidFill>
+                  <a:srgbClr val="22282E"/>
+                </a:solidFill>
+              </a:rPr>
+              <a:t>•  Integra el gate en CI. El job de build debe (a) lintar con hadolint, (b) escanear con Trivy y fallar con CRITICAL, (c) firmar solo si pasa, (d) publicar el digest.</a:t>
+            </a:r>
+          </a:p>
+          <a:p>
+            <a:pPr>
+              <a:spcAft>
+                <a:spcPts val="600"/>
+              </a:spcAft>
+            </a:pPr>
+            <a:r>
+              <a:rPr sz="1500">
+                <a:solidFill>
+                  <a:srgbClr val="22282E"/>
+                </a:solidFill>
+              </a:rPr>
+              <a:t>•  Admission en el clúster (conceptual/opcional). Configura una política (cosign policy-controller o Kyverno) que solo admita imágenes firmadas por tu identidad.</a:t>
             </a:r>
           </a:p>
         </p:txBody>
@@ -3347,7 +3381,7 @@
                   <a:srgbClr val="0B3D2E"/>
                 </a:solidFill>
               </a:rPr>
-              <a:t>❓ Preguntas frecuentes</a:t>
+              <a:t>✍️ Ejercicios</a:t>
             </a:r>
           </a:p>
         </p:txBody>
@@ -3385,97 +3419,82 @@
                   <a:srgbClr val="22282E"/>
                 </a:solidFill>
               </a:rPr>
-              <a:t>•  ❓ ¿Distroless o Alpine?</a:t>
-            </a:r>
-          </a:p>
-          <a:p>
-            <a:pPr>
-              <a:spcAft>
-                <a:spcPts val="600"/>
-              </a:spcAft>
-            </a:pPr>
-            <a:r>
-              <a:rPr sz="1500">
-                <a:solidFill>
-                  <a:srgbClr val="22282E"/>
-                </a:solidFill>
-              </a:rPr>
-              <a:t>•  Distroless minimiza al máximo (sin shell, ideal para producción y para reducir superficie). Alpine es más pequeña que Debian y conserva shell/apk, útil para depurar. Elige según necesidad de troubleshooting vs mínima superficie.</a:t>
-            </a:r>
-          </a:p>
-          <a:p>
-            <a:pPr>
-              <a:spcAft>
-                <a:spcPts val="600"/>
-              </a:spcAft>
-            </a:pPr>
-            <a:r>
-              <a:rPr sz="1500">
-                <a:solidFill>
-                  <a:srgbClr val="22282E"/>
-                </a:solidFill>
-              </a:rPr>
-              <a:t>•  ❓ ¿Firmar la imagen impide que sea vulnerable?</a:t>
-            </a:r>
-          </a:p>
-          <a:p>
-            <a:pPr>
-              <a:spcAft>
-                <a:spcPts val="600"/>
-              </a:spcAft>
-            </a:pPr>
-            <a:r>
-              <a:rPr sz="1500">
-                <a:solidFill>
-                  <a:srgbClr val="22282E"/>
-                </a:solidFill>
-              </a:rPr>
-              <a:t>•  No. La firma garantiza integridad y procedencia, no ausencia de CVE. Necesitas escanear además de firmar.</a:t>
-            </a:r>
-          </a:p>
-          <a:p>
-            <a:pPr>
-              <a:spcAft>
-                <a:spcPts val="600"/>
-              </a:spcAft>
-            </a:pPr>
-            <a:r>
-              <a:rPr sz="1500">
-                <a:solidFill>
-                  <a:srgbClr val="22282E"/>
-                </a:solidFill>
-              </a:rPr>
-              <a:t>•  ❓ ¿Debo escanear en build o en el registry?</a:t>
-            </a:r>
-          </a:p>
-          <a:p>
-            <a:pPr>
-              <a:spcAft>
-                <a:spcPts val="600"/>
-              </a:spcAft>
-            </a:pPr>
-            <a:r>
-              <a:rPr sz="1500">
-                <a:solidFill>
-                  <a:srgbClr val="22282E"/>
-                </a:solidFill>
-              </a:rPr>
-              <a:t>•  Ambos. En build para bloquear temprano; en el registry de forma continua porque aparecen CVE nuevos sobre imágenes ya publicadas.</a:t>
-            </a:r>
-          </a:p>
-          <a:p>
-            <a:pPr>
-              <a:spcAft>
-                <a:spcPts val="600"/>
-              </a:spcAft>
-            </a:pPr>
-            <a:r>
-              <a:rPr sz="1500">
-                <a:solidFill>
-                  <a:srgbClr val="22282E"/>
-                </a:solidFill>
-              </a:rPr>
-              <a:t>•  ❓ ¿Keyless de cosign es seguro sin gestionar claves?</a:t>
+              <a:t>•  Convierte un Dockerfile de una sola etapa a multi-stage y mide la reducción de tamaño.</a:t>
+            </a:r>
+          </a:p>
+          <a:p>
+            <a:pPr>
+              <a:spcAft>
+                <a:spcPts val="600"/>
+              </a:spcAft>
+            </a:pPr>
+            <a:r>
+              <a:rPr sz="1500">
+                <a:solidFill>
+                  <a:srgbClr val="22282E"/>
+                </a:solidFill>
+              </a:rPr>
+              <a:t>•  Cambia una imagen base ubuntu por distroless y compara los CVE con Trivy.</a:t>
+            </a:r>
+          </a:p>
+          <a:p>
+            <a:pPr>
+              <a:spcAft>
+                <a:spcPts val="600"/>
+              </a:spcAft>
+            </a:pPr>
+            <a:r>
+              <a:rPr sz="1500">
+                <a:solidFill>
+                  <a:srgbClr val="22282E"/>
+                </a:solidFill>
+              </a:rPr>
+              <a:t>•  Configura el contenedor para correr como usuario no-root y verifícalo.</a:t>
+            </a:r>
+          </a:p>
+          <a:p>
+            <a:pPr>
+              <a:spcAft>
+                <a:spcPts val="600"/>
+              </a:spcAft>
+            </a:pPr>
+            <a:r>
+              <a:rPr sz="1500">
+                <a:solidFill>
+                  <a:srgbClr val="22282E"/>
+                </a:solidFill>
+              </a:rPr>
+              <a:t>•  Firma una imagen con cosign y verifica la firma.</a:t>
+            </a:r>
+          </a:p>
+          <a:p>
+            <a:pPr>
+              <a:spcAft>
+                <a:spcPts val="600"/>
+              </a:spcAft>
+            </a:pPr>
+            <a:r>
+              <a:rPr sz="1500">
+                <a:solidFill>
+                  <a:srgbClr val="22282E"/>
+                </a:solidFill>
+              </a:rPr>
+              <a:t>•  Añade un gate de Trivy que rompa el build con vulnerabilidades CRITICAL.</a:t>
+            </a:r>
+          </a:p>
+          <a:p>
+            <a:pPr>
+              <a:spcAft>
+                <a:spcPts val="600"/>
+              </a:spcAft>
+            </a:pPr>
+            <a:r>
+              <a:rPr sz="1500">
+                <a:solidFill>
+                  <a:srgbClr val="22282E"/>
+                </a:solidFill>
+              </a:rPr>
+              <a:t>•  Genera el SBOM de la imagen en formato CycloneDX.</a:t>
             </a:r>
           </a:p>
         </p:txBody>
@@ -3526,7 +3545,7 @@
                   <a:srgbClr val="0B3D2E"/>
                 </a:solidFill>
               </a:rPr>
-              <a:t>🔗 Referencias</a:t>
+              <a:t>📝 Reto verificable</a:t>
             </a:r>
           </a:p>
         </p:txBody>
@@ -3564,6 +3583,483 @@
                   <a:srgbClr val="22282E"/>
                 </a:solidFill>
               </a:rPr>
+              <a:t>•  Construye un pipeline que produzca una imagen mínima, escaneada y firmada.</a:t>
+            </a:r>
+          </a:p>
+          <a:p>
+            <a:pPr>
+              <a:spcAft>
+                <a:spcPts val="600"/>
+              </a:spcAft>
+            </a:pPr>
+            <a:r>
+              <a:rPr sz="1500">
+                <a:solidFill>
+                  <a:srgbClr val="22282E"/>
+                </a:solidFill>
+              </a:rPr>
+              <a:t>•  Criterio de aceptación: (a) la imagen final usa multi-stage y base mínima/distroless y corre</a:t>
+            </a:r>
+          </a:p>
+          <a:p>
+            <a:pPr>
+              <a:spcAft>
+                <a:spcPts val="600"/>
+              </a:spcAft>
+            </a:pPr>
+            <a:r>
+              <a:rPr sz="1500">
+                <a:solidFill>
+                  <a:srgbClr val="22282E"/>
+                </a:solidFill>
+              </a:rPr>
+              <a:t>•  como no-root; (b) hadolint no reporta errores; (c) Trivy no reporta CVE CRITICAL y el gate falla</a:t>
+            </a:r>
+          </a:p>
+          <a:p>
+            <a:pPr>
+              <a:spcAft>
+                <a:spcPts val="600"/>
+              </a:spcAft>
+            </a:pPr>
+            <a:r>
+              <a:rPr sz="1500">
+                <a:solidFill>
+                  <a:srgbClr val="22282E"/>
+                </a:solidFill>
+              </a:rPr>
+              <a:t>•  si aparecen; (d) la imagen se firma con cosign y la firma se verifica; y (e) se genera y publica</a:t>
+            </a:r>
+          </a:p>
+          <a:p>
+            <a:pPr>
+              <a:spcAft>
+                <a:spcPts val="600"/>
+              </a:spcAft>
+            </a:pPr>
+            <a:r>
+              <a:rPr sz="1500">
+                <a:solidFill>
+                  <a:srgbClr val="22282E"/>
+                </a:solidFill>
+              </a:rPr>
+              <a:t>•  un SBOM de la imagen.</a:t>
+            </a:r>
+          </a:p>
+        </p:txBody>
+      </p:sp>
+    </p:spTree>
+  </p:cSld>
+  <p:clrMapOvr>
+    <a:masterClrMapping/>
+  </p:clrMapOvr>
+</p:sld>
+</file>
+
+<file path=ppt/slides/slide13.xml><?xml version="1.0" encoding="utf-8"?>
+<p:sld xmlns:a="http://schemas.openxmlformats.org/drawingml/2006/main" xmlns:p="http://schemas.openxmlformats.org/presentationml/2006/main" xmlns:r="http://schemas.openxmlformats.org/officeDocument/2006/relationships">
+  <p:cSld>
+    <p:spTree>
+      <p:nvGrpSpPr>
+        <p:cNvPr id="1" name=""/>
+        <p:cNvGrpSpPr/>
+        <p:nvPr/>
+      </p:nvGrpSpPr>
+      <p:grpSpPr/>
+      <p:sp>
+        <p:nvSpPr>
+          <p:cNvPr id="2" name="TextBox 1"/>
+          <p:cNvSpPr txBox="1"/>
+          <p:nvPr/>
+        </p:nvSpPr>
+        <p:spPr>
+          <a:xfrm>
+            <a:off x="457200" y="320040"/>
+            <a:ext cx="8229600" cy="822960"/>
+          </a:xfrm>
+          <a:prstGeom prst="rect">
+            <a:avLst/>
+          </a:prstGeom>
+          <a:noFill/>
+        </p:spPr>
+        <p:txBody>
+          <a:bodyPr wrap="square">
+            <a:spAutoFit/>
+          </a:bodyPr>
+          <a:lstStyle/>
+          <a:p>
+            <a:r>
+              <a:rPr sz="2600" b="1">
+                <a:solidFill>
+                  <a:srgbClr val="0B3D2E"/>
+                </a:solidFill>
+              </a:rPr>
+              <a:t>⚠️ Errores comunes</a:t>
+            </a:r>
+          </a:p>
+        </p:txBody>
+      </p:sp>
+      <p:sp>
+        <p:nvSpPr>
+          <p:cNvPr id="3" name="TextBox 2"/>
+          <p:cNvSpPr txBox="1"/>
+          <p:nvPr/>
+        </p:nvSpPr>
+        <p:spPr>
+          <a:xfrm>
+            <a:off x="457200" y="1280160"/>
+            <a:ext cx="8229600" cy="4937760"/>
+          </a:xfrm>
+          <a:prstGeom prst="rect">
+            <a:avLst/>
+          </a:prstGeom>
+          <a:noFill/>
+        </p:spPr>
+        <p:txBody>
+          <a:bodyPr wrap="square">
+            <a:spAutoFit/>
+          </a:bodyPr>
+          <a:lstStyle/>
+          <a:p>
+            <a:pPr>
+              <a:spcAft>
+                <a:spcPts val="600"/>
+              </a:spcAft>
+            </a:pPr>
+            <a:r>
+              <a:rPr sz="1500">
+                <a:solidFill>
+                  <a:srgbClr val="22282E"/>
+                </a:solidFill>
+              </a:rPr>
+              <a:t>•  Imagen de 1.2 GB con cientos de CVE — Base pesada y build en una etapa. Usa multi-stage + distroless/alpine.</a:t>
+            </a:r>
+          </a:p>
+          <a:p>
+            <a:pPr>
+              <a:spcAft>
+                <a:spcPts val="600"/>
+              </a:spcAft>
+            </a:pPr>
+            <a:r>
+              <a:rPr sz="1500">
+                <a:solidFill>
+                  <a:srgbClr val="22282E"/>
+                </a:solidFill>
+              </a:rPr>
+              <a:t>•  El contenedor corre como root — No definiste USER. Añade un usuario no-root o usa base :nonroot.</a:t>
+            </a:r>
+          </a:p>
+          <a:p>
+            <a:pPr>
+              <a:spcAft>
+                <a:spcPts val="600"/>
+              </a:spcAft>
+            </a:pPr>
+            <a:r>
+              <a:rPr sz="1500">
+                <a:solidFill>
+                  <a:srgbClr val="22282E"/>
+                </a:solidFill>
+              </a:rPr>
+              <a:t>•  cosign verify falla — Identidad/issuer no coinciden. Ajusta --certificate-identity al del firmante real.</a:t>
+            </a:r>
+          </a:p>
+          <a:p>
+            <a:pPr>
+              <a:spcAft>
+                <a:spcPts val="600"/>
+              </a:spcAft>
+            </a:pPr>
+            <a:r>
+              <a:rPr sz="1500">
+                <a:solidFill>
+                  <a:srgbClr val="22282E"/>
+                </a:solidFill>
+              </a:rPr>
+              <a:t>•  Trivy reporta CVE sin fix disponible — No hay parche aún. Documenta como riesgo aceptado/VEX y monitoriza.</a:t>
+            </a:r>
+          </a:p>
+          <a:p>
+            <a:pPr>
+              <a:spcAft>
+                <a:spcPts val="600"/>
+              </a:spcAft>
+            </a:pPr>
+            <a:r>
+              <a:rPr sz="1500">
+                <a:solidFill>
+                  <a:srgbClr val="22282E"/>
+                </a:solidFill>
+              </a:rPr>
+              <a:t>•  La imagen firmada se puede sustituir por otra — Firmaste el tag, no el digest. Firma y despliega por digest inmutable.</a:t>
+            </a:r>
+          </a:p>
+        </p:txBody>
+      </p:sp>
+    </p:spTree>
+  </p:cSld>
+  <p:clrMapOvr>
+    <a:masterClrMapping/>
+  </p:clrMapOvr>
+</p:sld>
+</file>
+
+<file path=ppt/slides/slide14.xml><?xml version="1.0" encoding="utf-8"?>
+<p:sld xmlns:a="http://schemas.openxmlformats.org/drawingml/2006/main" xmlns:p="http://schemas.openxmlformats.org/presentationml/2006/main" xmlns:r="http://schemas.openxmlformats.org/officeDocument/2006/relationships">
+  <p:cSld>
+    <p:spTree>
+      <p:nvGrpSpPr>
+        <p:cNvPr id="1" name=""/>
+        <p:cNvGrpSpPr/>
+        <p:nvPr/>
+      </p:nvGrpSpPr>
+      <p:grpSpPr/>
+      <p:sp>
+        <p:nvSpPr>
+          <p:cNvPr id="2" name="TextBox 1"/>
+          <p:cNvSpPr txBox="1"/>
+          <p:nvPr/>
+        </p:nvSpPr>
+        <p:spPr>
+          <a:xfrm>
+            <a:off x="457200" y="320040"/>
+            <a:ext cx="8229600" cy="822960"/>
+          </a:xfrm>
+          <a:prstGeom prst="rect">
+            <a:avLst/>
+          </a:prstGeom>
+          <a:noFill/>
+        </p:spPr>
+        <p:txBody>
+          <a:bodyPr wrap="square">
+            <a:spAutoFit/>
+          </a:bodyPr>
+          <a:lstStyle/>
+          <a:p>
+            <a:r>
+              <a:rPr sz="2600" b="1">
+                <a:solidFill>
+                  <a:srgbClr val="0B3D2E"/>
+                </a:solidFill>
+              </a:rPr>
+              <a:t>❓ Preguntas frecuentes</a:t>
+            </a:r>
+          </a:p>
+        </p:txBody>
+      </p:sp>
+      <p:sp>
+        <p:nvSpPr>
+          <p:cNvPr id="3" name="TextBox 2"/>
+          <p:cNvSpPr txBox="1"/>
+          <p:nvPr/>
+        </p:nvSpPr>
+        <p:spPr>
+          <a:xfrm>
+            <a:off x="457200" y="1280160"/>
+            <a:ext cx="8229600" cy="4937760"/>
+          </a:xfrm>
+          <a:prstGeom prst="rect">
+            <a:avLst/>
+          </a:prstGeom>
+          <a:noFill/>
+        </p:spPr>
+        <p:txBody>
+          <a:bodyPr wrap="square">
+            <a:spAutoFit/>
+          </a:bodyPr>
+          <a:lstStyle/>
+          <a:p>
+            <a:pPr>
+              <a:spcAft>
+                <a:spcPts val="600"/>
+              </a:spcAft>
+            </a:pPr>
+            <a:r>
+              <a:rPr sz="1500">
+                <a:solidFill>
+                  <a:srgbClr val="22282E"/>
+                </a:solidFill>
+              </a:rPr>
+              <a:t>•  ❓ ¿Distroless o Alpine?</a:t>
+            </a:r>
+          </a:p>
+          <a:p>
+            <a:pPr>
+              <a:spcAft>
+                <a:spcPts val="600"/>
+              </a:spcAft>
+            </a:pPr>
+            <a:r>
+              <a:rPr sz="1500">
+                <a:solidFill>
+                  <a:srgbClr val="22282E"/>
+                </a:solidFill>
+              </a:rPr>
+              <a:t>•  Distroless minimiza al máximo (sin shell, ideal para producción y para reducir superficie). Alpine es más pequeña que Debian y conserva shell/apk, útil para depurar. Elige según necesidad de…</a:t>
+            </a:r>
+          </a:p>
+          <a:p>
+            <a:pPr>
+              <a:spcAft>
+                <a:spcPts val="600"/>
+              </a:spcAft>
+            </a:pPr>
+            <a:r>
+              <a:rPr sz="1500">
+                <a:solidFill>
+                  <a:srgbClr val="22282E"/>
+                </a:solidFill>
+              </a:rPr>
+              <a:t>•  ❓ ¿Firmar la imagen impide que sea vulnerable?</a:t>
+            </a:r>
+          </a:p>
+          <a:p>
+            <a:pPr>
+              <a:spcAft>
+                <a:spcPts val="600"/>
+              </a:spcAft>
+            </a:pPr>
+            <a:r>
+              <a:rPr sz="1500">
+                <a:solidFill>
+                  <a:srgbClr val="22282E"/>
+                </a:solidFill>
+              </a:rPr>
+              <a:t>•  No. La firma garantiza integridad y procedencia, no ausencia de CVE. Necesitas escanear además de firmar.</a:t>
+            </a:r>
+          </a:p>
+          <a:p>
+            <a:pPr>
+              <a:spcAft>
+                <a:spcPts val="600"/>
+              </a:spcAft>
+            </a:pPr>
+            <a:r>
+              <a:rPr sz="1500">
+                <a:solidFill>
+                  <a:srgbClr val="22282E"/>
+                </a:solidFill>
+              </a:rPr>
+              <a:t>•  ❓ ¿Debo escanear en build o en el registry?</a:t>
+            </a:r>
+          </a:p>
+          <a:p>
+            <a:pPr>
+              <a:spcAft>
+                <a:spcPts val="600"/>
+              </a:spcAft>
+            </a:pPr>
+            <a:r>
+              <a:rPr sz="1500">
+                <a:solidFill>
+                  <a:srgbClr val="22282E"/>
+                </a:solidFill>
+              </a:rPr>
+              <a:t>•  Ambos. En build para bloquear temprano; en el registry de forma continua porque aparecen CVE nuevos sobre imágenes ya publicadas.</a:t>
+            </a:r>
+          </a:p>
+          <a:p>
+            <a:pPr>
+              <a:spcAft>
+                <a:spcPts val="600"/>
+              </a:spcAft>
+            </a:pPr>
+            <a:r>
+              <a:rPr sz="1500">
+                <a:solidFill>
+                  <a:srgbClr val="22282E"/>
+                </a:solidFill>
+              </a:rPr>
+              <a:t>•  ❓ ¿Keyless de cosign es seguro sin gestionar claves?</a:t>
+            </a:r>
+          </a:p>
+        </p:txBody>
+      </p:sp>
+    </p:spTree>
+  </p:cSld>
+  <p:clrMapOvr>
+    <a:masterClrMapping/>
+  </p:clrMapOvr>
+</p:sld>
+</file>
+
+<file path=ppt/slides/slide15.xml><?xml version="1.0" encoding="utf-8"?>
+<p:sld xmlns:a="http://schemas.openxmlformats.org/drawingml/2006/main" xmlns:p="http://schemas.openxmlformats.org/presentationml/2006/main" xmlns:r="http://schemas.openxmlformats.org/officeDocument/2006/relationships">
+  <p:cSld>
+    <p:spTree>
+      <p:nvGrpSpPr>
+        <p:cNvPr id="1" name=""/>
+        <p:cNvGrpSpPr/>
+        <p:nvPr/>
+      </p:nvGrpSpPr>
+      <p:grpSpPr/>
+      <p:sp>
+        <p:nvSpPr>
+          <p:cNvPr id="2" name="TextBox 1"/>
+          <p:cNvSpPr txBox="1"/>
+          <p:nvPr/>
+        </p:nvSpPr>
+        <p:spPr>
+          <a:xfrm>
+            <a:off x="457200" y="320040"/>
+            <a:ext cx="8229600" cy="822960"/>
+          </a:xfrm>
+          <a:prstGeom prst="rect">
+            <a:avLst/>
+          </a:prstGeom>
+          <a:noFill/>
+        </p:spPr>
+        <p:txBody>
+          <a:bodyPr wrap="square">
+            <a:spAutoFit/>
+          </a:bodyPr>
+          <a:lstStyle/>
+          <a:p>
+            <a:r>
+              <a:rPr sz="2600" b="1">
+                <a:solidFill>
+                  <a:srgbClr val="0B3D2E"/>
+                </a:solidFill>
+              </a:rPr>
+              <a:t>🔗 Referencias</a:t>
+            </a:r>
+          </a:p>
+        </p:txBody>
+      </p:sp>
+      <p:sp>
+        <p:nvSpPr>
+          <p:cNvPr id="3" name="TextBox 2"/>
+          <p:cNvSpPr txBox="1"/>
+          <p:nvPr/>
+        </p:nvSpPr>
+        <p:spPr>
+          <a:xfrm>
+            <a:off x="457200" y="1280160"/>
+            <a:ext cx="8229600" cy="4937760"/>
+          </a:xfrm>
+          <a:prstGeom prst="rect">
+            <a:avLst/>
+          </a:prstGeom>
+          <a:noFill/>
+        </p:spPr>
+        <p:txBody>
+          <a:bodyPr wrap="square">
+            <a:spAutoFit/>
+          </a:bodyPr>
+          <a:lstStyle/>
+          <a:p>
+            <a:pPr>
+              <a:spcAft>
+                <a:spcPts val="600"/>
+              </a:spcAft>
+            </a:pPr>
+            <a:r>
+              <a:rPr sz="1500">
+                <a:solidFill>
+                  <a:srgbClr val="22282E"/>
+                </a:solidFill>
+              </a:rPr>
               <a:t>•  NIST SP 800-190 Container Security — &lt;https://csrc.nist.gov/pubs/sp/800/190/final&gt;</a:t>
             </a:r>
           </a:p>
@@ -3629,6 +4125,81 @@
           </a:p>
         </p:txBody>
       </p:sp>
+    </p:spTree>
+  </p:cSld>
+  <p:clrMapOvr>
+    <a:masterClrMapping/>
+  </p:clrMapOvr>
+</p:sld>
+</file>
+
+<file path=ppt/slides/slide16.xml><?xml version="1.0" encoding="utf-8"?>
+<p:sld xmlns:a="http://schemas.openxmlformats.org/drawingml/2006/main" xmlns:p="http://schemas.openxmlformats.org/presentationml/2006/main" xmlns:r="http://schemas.openxmlformats.org/officeDocument/2006/relationships">
+  <p:cSld>
+    <p:spTree>
+      <p:nvGrpSpPr>
+        <p:cNvPr id="1" name=""/>
+        <p:cNvGrpSpPr/>
+        <p:nvPr/>
+      </p:nvGrpSpPr>
+      <p:grpSpPr/>
+      <p:sp>
+        <p:nvSpPr>
+          <p:cNvPr id="2" name="TextBox 1"/>
+          <p:cNvSpPr txBox="1"/>
+          <p:nvPr/>
+        </p:nvSpPr>
+        <p:spPr>
+          <a:xfrm>
+            <a:off x="457200" y="274320"/>
+            <a:ext cx="8229600" cy="640080"/>
+          </a:xfrm>
+          <a:prstGeom prst="rect">
+            <a:avLst/>
+          </a:prstGeom>
+          <a:noFill/>
+        </p:spPr>
+        <p:txBody>
+          <a:bodyPr wrap="square">
+            <a:spAutoFit/>
+          </a:bodyPr>
+          <a:lstStyle/>
+          <a:p>
+            <a:r>
+              <a:rPr sz="2200" b="1">
+                <a:solidFill>
+                  <a:srgbClr val="0B3D2E"/>
+                </a:solidFill>
+              </a:rPr>
+              <a:t>Diagrama de la clase</a:t>
+            </a:r>
+          </a:p>
+        </p:txBody>
+      </p:sp>
+      <p:pic>
+        <p:nvPicPr>
+          <p:cNvPr id="3" name="Picture 2" descr="e603dfa450316102.png"/>
+          <p:cNvPicPr>
+            <a:picLocks noChangeAspect="1"/>
+          </p:cNvPicPr>
+          <p:nvPr/>
+        </p:nvPicPr>
+        <p:blipFill>
+          <a:blip r:embed="rId2"/>
+          <a:stretch>
+            <a:fillRect/>
+          </a:stretch>
+        </p:blipFill>
+        <p:spPr>
+          <a:xfrm>
+            <a:off x="457200" y="3396996"/>
+            <a:ext cx="8229600" cy="704088"/>
+          </a:xfrm>
+          <a:prstGeom prst="rect">
+            <a:avLst/>
+          </a:prstGeom>
+        </p:spPr>
+      </p:pic>
     </p:spTree>
   </p:cSld>
   <p:clrMapOvr>
@@ -4167,7 +4738,7 @@
                   <a:srgbClr val="0B3D2E"/>
                 </a:solidFill>
               </a:rPr>
-              <a:t>📖 Definiciones y características</a:t>
+              <a:t>🧠 Explicación en profundidad</a:t>
             </a:r>
           </a:p>
         </p:txBody>
@@ -4205,82 +4776,82 @@
                   <a:srgbClr val="22282E"/>
                 </a:solidFill>
               </a:rPr>
-              <a:t>•  Multi-stage build: separar la fase de compilación de la imagen final. Característica: la imagen de producción no lleva compiladores ni herramientas de build.</a:t>
-            </a:r>
-          </a:p>
-          <a:p>
-            <a:pPr>
-              <a:spcAft>
-                <a:spcPts val="600"/>
-              </a:spcAft>
-            </a:pPr>
-            <a:r>
-              <a:rPr sz="1500">
-                <a:solidFill>
-                  <a:srgbClr val="22282E"/>
-                </a:solidFill>
-              </a:rPr>
-              <a:t>•  Distroless: imagen base sin shell ni gestor de paquetes, solo el runtime. Característica: reduce drásticamente la superficie de ataque.</a:t>
-            </a:r>
-          </a:p>
-          <a:p>
-            <a:pPr>
-              <a:spcAft>
-                <a:spcPts val="600"/>
-              </a:spcAft>
-            </a:pPr>
-            <a:r>
-              <a:rPr sz="1500">
-                <a:solidFill>
-                  <a:srgbClr val="22282E"/>
-                </a:solidFill>
-              </a:rPr>
-              <a:t>•  Usuario no-root: correr el proceso con un UID sin privilegios. Característica: un escape de aplicación no obtiene root en el contenedor.</a:t>
-            </a:r>
-          </a:p>
-          <a:p>
-            <a:pPr>
-              <a:spcAft>
-                <a:spcPts val="600"/>
-              </a:spcAft>
-            </a:pPr>
-            <a:r>
-              <a:rPr sz="1500">
-                <a:solidFill>
-                  <a:srgbClr val="22282E"/>
-                </a:solidFill>
-              </a:rPr>
-              <a:t>•  Escaneo de imagen: cruzar los paquetes de la imagen con bases de CVE. Característica: cubre capa de OS y dependencias de la app.</a:t>
-            </a:r>
-          </a:p>
-          <a:p>
-            <a:pPr>
-              <a:spcAft>
-                <a:spcPts val="600"/>
-              </a:spcAft>
-            </a:pPr>
-            <a:r>
-              <a:rPr sz="1500">
-                <a:solidFill>
-                  <a:srgbClr val="22282E"/>
-                </a:solidFill>
-              </a:rPr>
-              <a:t>•  Firma (cosign): firma criptográfica de la imagen y su digest. Característica: verifica integridad y procedencia; keyless usa OIDC + transparency log.</a:t>
-            </a:r>
-          </a:p>
-          <a:p>
-            <a:pPr>
-              <a:spcAft>
-                <a:spcPts val="600"/>
-              </a:spcAft>
-            </a:pPr>
-            <a:r>
-              <a:rPr sz="1500">
-                <a:solidFill>
-                  <a:srgbClr val="22282E"/>
-                </a:solidFill>
-              </a:rPr>
-              <a:t>•  Admission control: política que solo admite imágenes que cumplen requisitos. Característica: bloquea en el registry o en Kubernetes lo no firmado/vulnerable.</a:t>
+              <a:t>•  Una imagen es un sistema de archivos por capas más metadatos de ejecución. Reducirla elimina paquetes y superficie, pero «mínima» no significa automáticamente segura: una aplicación vulnerable sigue…</a:t>
+            </a:r>
+          </a:p>
+          <a:p>
+            <a:pPr>
+              <a:spcAft>
+                <a:spcPts val="600"/>
+              </a:spcAft>
+            </a:pPr>
+            <a:r>
+              <a:rPr sz="1500">
+                <a:solidFill>
+                  <a:srgbClr val="22282E"/>
+                </a:solidFill>
+              </a:rPr>
+              <a:t>•  El diagrama enseña una cadena de identidad. La etiqueta app:1.0 es una referencia humana que puede apuntar a otro contenido; el digest identifica bytes concretos. La firma debe cubrir ese digest y la…</a:t>
+            </a:r>
+          </a:p>
+          <a:p>
+            <a:pPr>
+              <a:spcAft>
+                <a:spcPts val="600"/>
+              </a:spcAft>
+            </a:pPr>
+            <a:r>
+              <a:rPr sz="1500">
+                <a:solidFill>
+                  <a:srgbClr val="22282E"/>
+                </a:solidFill>
+              </a:rPr>
+              <a:t>•  Multi-stage separa herramientas de compilación del runtime, pero no borra automáticamente secretos copiados en una etapa o incluidos en el contexto. Se usan montajes de secretos del builder…</a:t>
+            </a:r>
+          </a:p>
+          <a:p>
+            <a:pPr>
+              <a:spcAft>
+                <a:spcPts val="600"/>
+              </a:spcAft>
+            </a:pPr>
+            <a:r>
+              <a:rPr sz="1500">
+                <a:solidFill>
+                  <a:srgbClr val="22282E"/>
+                </a:solidFill>
+              </a:rPr>
+              <a:t>•  El escaneo debe observar la imagen final y su SBOM. Un CVE en el stage de build importa de manera distinta a uno distribuido, aunque el constructor también puede ser atacado durante el build. Los…</a:t>
+            </a:r>
+          </a:p>
+          <a:p>
+            <a:pPr>
+              <a:spcAft>
+                <a:spcPts val="600"/>
+              </a:spcAft>
+            </a:pPr>
+            <a:r>
+              <a:rPr sz="1500">
+                <a:solidFill>
+                  <a:srgbClr val="22282E"/>
+                </a:solidFill>
+              </a:rPr>
+              <a:t>•  El usuario no-root, sistema de archivos de solo lectura, capacidades Linux mínimas, seccomp, límites de recursos y ausencia de sockets privilegiados reducen el impacto. No constituyen una frontera…</a:t>
+            </a:r>
+          </a:p>
+          <a:p>
+            <a:pPr>
+              <a:spcAft>
+                <a:spcPts val="600"/>
+              </a:spcAft>
+            </a:pPr>
+            <a:r>
+              <a:rPr sz="1500">
+                <a:solidFill>
+                  <a:srgbClr val="22282E"/>
+                </a:solidFill>
+              </a:rPr>
+              <a:t>•  Una imagen distroless de 30 MB pasa el escáner de paquetes, pero ejecuta como UID 0 y monta el socket de Docker para lanzar tareas. Un compromiso de la aplicación puede controlar el daemon del host.…</a:t>
             </a:r>
           </a:p>
         </p:txBody>
@@ -4331,7 +4902,7 @@
                   <a:srgbClr val="0B3D2E"/>
                 </a:solidFill>
               </a:rPr>
-              <a:t>🧰 Herramientas y preparación</a:t>
+              <a:t>📔 Glosario operativo</a:t>
             </a:r>
           </a:p>
         </p:txBody>
@@ -4369,97 +4940,82 @@
                   <a:srgbClr val="22282E"/>
                 </a:solidFill>
               </a:rPr>
-              <a:t>•  Docker/BuildKit o buildah para construir.</a:t>
-            </a:r>
-          </a:p>
-          <a:p>
-            <a:pPr>
-              <a:spcAft>
-                <a:spcPts val="600"/>
-              </a:spcAft>
-            </a:pPr>
-            <a:r>
-              <a:rPr sz="1500">
-                <a:solidFill>
-                  <a:srgbClr val="22282E"/>
-                </a:solidFill>
-              </a:rPr>
-              <a:t>•  Trivy para escanear imágenes.</a:t>
-            </a:r>
-          </a:p>
-          <a:p>
-            <a:pPr>
-              <a:spcAft>
-                <a:spcPts val="600"/>
-              </a:spcAft>
-            </a:pPr>
-            <a:r>
-              <a:rPr sz="1500">
-                <a:solidFill>
-                  <a:srgbClr val="22282E"/>
-                </a:solidFill>
-              </a:rPr>
-              <a:t>•  hadolint para lintar Dockerfiles.</a:t>
-            </a:r>
-          </a:p>
-          <a:p>
-            <a:pPr>
-              <a:spcAft>
-                <a:spcPts val="600"/>
-              </a:spcAft>
-            </a:pPr>
-            <a:r>
-              <a:rPr sz="1500">
-                <a:solidFill>
-                  <a:srgbClr val="22282E"/>
-                </a:solidFill>
-              </a:rPr>
-              <a:t>•  cosign (Sigstore) para firmar y verificar.</a:t>
-            </a:r>
-          </a:p>
-          <a:p>
-            <a:pPr>
-              <a:spcAft>
-                <a:spcPts val="600"/>
-              </a:spcAft>
-            </a:pPr>
-            <a:r>
-              <a:rPr sz="1500">
-                <a:solidFill>
-                  <a:srgbClr val="22282E"/>
-                </a:solidFill>
-              </a:rPr>
-              <a:t>•  trivy image --severity HIGH,CRITICAL miapp:1.0</a:t>
-            </a:r>
-          </a:p>
-          <a:p>
-            <a:pPr>
-              <a:spcAft>
-                <a:spcPts val="600"/>
-              </a:spcAft>
-            </a:pPr>
-            <a:r>
-              <a:rPr sz="1500">
-                <a:solidFill>
-                  <a:srgbClr val="22282E"/>
-                </a:solidFill>
-              </a:rPr>
-              <a:t>•  docker run --rm -i hadolint/hadolint &lt; Dockerfile</a:t>
-            </a:r>
-          </a:p>
-          <a:p>
-            <a:pPr>
-              <a:spcAft>
-                <a:spcPts val="600"/>
-              </a:spcAft>
-            </a:pPr>
-            <a:r>
-              <a:rPr sz="1500">
-                <a:solidFill>
-                  <a:srgbClr val="22282E"/>
-                </a:solidFill>
-              </a:rPr>
-              <a:t>•  cosign sign miregistry/miapp@sha256:&lt;digest&gt;</a:t>
+              <a:t>•  Término — Definición útil</a:t>
+            </a:r>
+          </a:p>
+          <a:p>
+            <a:pPr>
+              <a:spcAft>
+                <a:spcPts val="600"/>
+              </a:spcAft>
+            </a:pPr>
+            <a:r>
+              <a:rPr sz="1500">
+                <a:solidFill>
+                  <a:srgbClr val="22282E"/>
+                </a:solidFill>
+              </a:rPr>
+              <a:t>•  Digest — Identificador criptográfico del contenido exacto de una imagen.</a:t>
+            </a:r>
+          </a:p>
+          <a:p>
+            <a:pPr>
+              <a:spcAft>
+                <a:spcPts val="600"/>
+              </a:spcAft>
+            </a:pPr>
+            <a:r>
+              <a:rPr sz="1500">
+                <a:solidFill>
+                  <a:srgbClr val="22282E"/>
+                </a:solidFill>
+              </a:rPr>
+              <a:t>•  Multi-stage build — Construcción con etapas separadas para no distribuir todas las herramientas.</a:t>
+            </a:r>
+          </a:p>
+          <a:p>
+            <a:pPr>
+              <a:spcAft>
+                <a:spcPts val="600"/>
+              </a:spcAft>
+            </a:pPr>
+            <a:r>
+              <a:rPr sz="1500">
+                <a:solidFill>
+                  <a:srgbClr val="22282E"/>
+                </a:solidFill>
+              </a:rPr>
+              <a:t>•  Distroless — Imagen de runtime sin distribución de propósito general; no implica invulnerabilidad.</a:t>
+            </a:r>
+          </a:p>
+          <a:p>
+            <a:pPr>
+              <a:spcAft>
+                <a:spcPts val="600"/>
+              </a:spcAft>
+            </a:pPr>
+            <a:r>
+              <a:rPr sz="1500">
+                <a:solidFill>
+                  <a:srgbClr val="22282E"/>
+                </a:solidFill>
+              </a:rPr>
+              <a:t>•  Admisión — Decisión previa a ejecutar basada en identidad y política del artefacto.</a:t>
+            </a:r>
+          </a:p>
+          <a:p>
+            <a:pPr>
+              <a:spcAft>
+                <a:spcPts val="600"/>
+              </a:spcAft>
+            </a:pPr>
+            <a:r>
+              <a:rPr sz="1500">
+                <a:solidFill>
+                  <a:srgbClr val="22282E"/>
+                </a:solidFill>
+              </a:rPr>
+              <a:t>•  Capacidad Linux — Privilegio granular que puede retirarse del proceso.</a:t>
             </a:r>
           </a:p>
         </p:txBody>
@@ -4510,7 +5066,7 @@
                   <a:srgbClr val="0B3D2E"/>
                 </a:solidFill>
               </a:rPr>
-              <a:t>🧪 Laboratorio guiado</a:t>
+              <a:t>✅ Criterio de dominio</a:t>
             </a:r>
           </a:p>
         </p:txBody>
@@ -4548,97 +5104,7 @@
                   <a:srgbClr val="22282E"/>
                 </a:solidFill>
               </a:rPr>
-              <a:t>•  Parte de un Dockerfile "malo" (imagen base pesada, root, sin pin) y lintéalo:</a:t>
-            </a:r>
-          </a:p>
-          <a:p>
-            <a:pPr>
-              <a:spcAft>
-                <a:spcPts val="600"/>
-              </a:spcAft>
-            </a:pPr>
-            <a:r>
-              <a:rPr sz="1500">
-                <a:solidFill>
-                  <a:srgbClr val="22282E"/>
-                </a:solidFill>
-              </a:rPr>
-              <a:t>•  docker run --rm -i hadolint/hadolint &lt; Dockerfile</a:t>
-            </a:r>
-          </a:p>
-          <a:p>
-            <a:pPr>
-              <a:spcAft>
-                <a:spcPts val="600"/>
-              </a:spcAft>
-            </a:pPr>
-            <a:r>
-              <a:rPr sz="1500">
-                <a:solidFill>
-                  <a:srgbClr val="22282E"/>
-                </a:solidFill>
-              </a:rPr>
-              <a:t>•  Reescríbelo seguro con multi-stage, base distroless y usuario no-root:</a:t>
-            </a:r>
-          </a:p>
-          <a:p>
-            <a:pPr>
-              <a:spcAft>
-                <a:spcPts val="600"/>
-              </a:spcAft>
-            </a:pPr>
-            <a:r>
-              <a:rPr sz="1500">
-                <a:solidFill>
-                  <a:srgbClr val="22282E"/>
-                </a:solidFill>
-              </a:rPr>
-              <a:t>•  FROM golang:1.22 AS build</a:t>
-            </a:r>
-          </a:p>
-          <a:p>
-            <a:pPr>
-              <a:spcAft>
-                <a:spcPts val="600"/>
-              </a:spcAft>
-            </a:pPr>
-            <a:r>
-              <a:rPr sz="1500">
-                <a:solidFill>
-                  <a:srgbClr val="22282E"/>
-                </a:solidFill>
-              </a:rPr>
-              <a:t>•  WORKDIR /src</a:t>
-            </a:r>
-          </a:p>
-          <a:p>
-            <a:pPr>
-              <a:spcAft>
-                <a:spcPts val="600"/>
-              </a:spcAft>
-            </a:pPr>
-            <a:r>
-              <a:rPr sz="1500">
-                <a:solidFill>
-                  <a:srgbClr val="22282E"/>
-                </a:solidFill>
-              </a:rPr>
-              <a:t>•  COPY . .</a:t>
-            </a:r>
-          </a:p>
-          <a:p>
-            <a:pPr>
-              <a:spcAft>
-                <a:spcPts val="600"/>
-              </a:spcAft>
-            </a:pPr>
-            <a:r>
-              <a:rPr sz="1500">
-                <a:solidFill>
-                  <a:srgbClr val="22282E"/>
-                </a:solidFill>
-              </a:rPr>
-              <a:t>•  RUN CGOENABLED=0 go build -o /app .</a:t>
+              <a:t>•  El alumno domina la clase cuando puede seguir una imagen desde su base hasta runtime, demostrar su identidad por digest, explicar qué cubren escaneo y firma, evitar secretos en capas y justificar…</a:t>
             </a:r>
           </a:p>
         </p:txBody>
@@ -4689,7 +5155,7 @@
                   <a:srgbClr val="0B3D2E"/>
                 </a:solidFill>
               </a:rPr>
-              <a:t>✍️ Ejercicios</a:t>
+              <a:t>📖 Definiciones y características</a:t>
             </a:r>
           </a:p>
         </p:txBody>
@@ -4727,82 +5193,82 @@
                   <a:srgbClr val="22282E"/>
                 </a:solidFill>
               </a:rPr>
-              <a:t>•  Convierte un Dockerfile de una sola etapa a multi-stage y mide la reducción de tamaño.</a:t>
-            </a:r>
-          </a:p>
-          <a:p>
-            <a:pPr>
-              <a:spcAft>
-                <a:spcPts val="600"/>
-              </a:spcAft>
-            </a:pPr>
-            <a:r>
-              <a:rPr sz="1500">
-                <a:solidFill>
-                  <a:srgbClr val="22282E"/>
-                </a:solidFill>
-              </a:rPr>
-              <a:t>•  Cambia una imagen base ubuntu por distroless y compara los CVE con Trivy.</a:t>
-            </a:r>
-          </a:p>
-          <a:p>
-            <a:pPr>
-              <a:spcAft>
-                <a:spcPts val="600"/>
-              </a:spcAft>
-            </a:pPr>
-            <a:r>
-              <a:rPr sz="1500">
-                <a:solidFill>
-                  <a:srgbClr val="22282E"/>
-                </a:solidFill>
-              </a:rPr>
-              <a:t>•  Configura el contenedor para correr como usuario no-root y verifícalo.</a:t>
-            </a:r>
-          </a:p>
-          <a:p>
-            <a:pPr>
-              <a:spcAft>
-                <a:spcPts val="600"/>
-              </a:spcAft>
-            </a:pPr>
-            <a:r>
-              <a:rPr sz="1500">
-                <a:solidFill>
-                  <a:srgbClr val="22282E"/>
-                </a:solidFill>
-              </a:rPr>
-              <a:t>•  Firma una imagen con cosign y verifica la firma.</a:t>
-            </a:r>
-          </a:p>
-          <a:p>
-            <a:pPr>
-              <a:spcAft>
-                <a:spcPts val="600"/>
-              </a:spcAft>
-            </a:pPr>
-            <a:r>
-              <a:rPr sz="1500">
-                <a:solidFill>
-                  <a:srgbClr val="22282E"/>
-                </a:solidFill>
-              </a:rPr>
-              <a:t>•  Añade un gate de Trivy que rompa el build con vulnerabilidades CRITICAL.</a:t>
-            </a:r>
-          </a:p>
-          <a:p>
-            <a:pPr>
-              <a:spcAft>
-                <a:spcPts val="600"/>
-              </a:spcAft>
-            </a:pPr>
-            <a:r>
-              <a:rPr sz="1500">
-                <a:solidFill>
-                  <a:srgbClr val="22282E"/>
-                </a:solidFill>
-              </a:rPr>
-              <a:t>•  Genera el SBOM de la imagen en formato CycloneDX.</a:t>
+              <a:t>•  Multi-stage build: separar la fase de compilación de la imagen final. Característica: la imagen de producción no lleva compiladores ni herramientas de build.</a:t>
+            </a:r>
+          </a:p>
+          <a:p>
+            <a:pPr>
+              <a:spcAft>
+                <a:spcPts val="600"/>
+              </a:spcAft>
+            </a:pPr>
+            <a:r>
+              <a:rPr sz="1500">
+                <a:solidFill>
+                  <a:srgbClr val="22282E"/>
+                </a:solidFill>
+              </a:rPr>
+              <a:t>•  Distroless: imagen base sin shell ni gestor de paquetes, solo el runtime. Característica: reduce drásticamente la superficie de ataque.</a:t>
+            </a:r>
+          </a:p>
+          <a:p>
+            <a:pPr>
+              <a:spcAft>
+                <a:spcPts val="600"/>
+              </a:spcAft>
+            </a:pPr>
+            <a:r>
+              <a:rPr sz="1500">
+                <a:solidFill>
+                  <a:srgbClr val="22282E"/>
+                </a:solidFill>
+              </a:rPr>
+              <a:t>•  Usuario no-root: correr el proceso con un UID sin privilegios. Característica: un escape de aplicación no obtiene root en el contenedor.</a:t>
+            </a:r>
+          </a:p>
+          <a:p>
+            <a:pPr>
+              <a:spcAft>
+                <a:spcPts val="600"/>
+              </a:spcAft>
+            </a:pPr>
+            <a:r>
+              <a:rPr sz="1500">
+                <a:solidFill>
+                  <a:srgbClr val="22282E"/>
+                </a:solidFill>
+              </a:rPr>
+              <a:t>•  Escaneo de imagen: cruzar los paquetes de la imagen con bases de CVE. Característica: cubre capa de OS y dependencias de la app.</a:t>
+            </a:r>
+          </a:p>
+          <a:p>
+            <a:pPr>
+              <a:spcAft>
+                <a:spcPts val="600"/>
+              </a:spcAft>
+            </a:pPr>
+            <a:r>
+              <a:rPr sz="1500">
+                <a:solidFill>
+                  <a:srgbClr val="22282E"/>
+                </a:solidFill>
+              </a:rPr>
+              <a:t>•  Firma (cosign): firma criptográfica de la imagen y su digest. Característica: verifica integridad y procedencia; keyless usa OIDC + transparency log.</a:t>
+            </a:r>
+          </a:p>
+          <a:p>
+            <a:pPr>
+              <a:spcAft>
+                <a:spcPts val="600"/>
+              </a:spcAft>
+            </a:pPr>
+            <a:r>
+              <a:rPr sz="1500">
+                <a:solidFill>
+                  <a:srgbClr val="22282E"/>
+                </a:solidFill>
+              </a:rPr>
+              <a:t>•  Admission control: política que solo admite imágenes que cumplen requisitos. Característica: bloquea en el registry o en Kubernetes lo no firmado/vulnerable.</a:t>
             </a:r>
           </a:p>
         </p:txBody>
@@ -4853,7 +5319,7 @@
                   <a:srgbClr val="0B3D2E"/>
                 </a:solidFill>
               </a:rPr>
-              <a:t>📝 Reto verificable</a:t>
+              <a:t>🧰 Herramientas y preparación</a:t>
             </a:r>
           </a:p>
         </p:txBody>
@@ -4891,67 +5357,52 @@
                   <a:srgbClr val="22282E"/>
                 </a:solidFill>
               </a:rPr>
-              <a:t>•  Construye un pipeline que produzca una imagen mínima, escaneada y firmada.</a:t>
-            </a:r>
-          </a:p>
-          <a:p>
-            <a:pPr>
-              <a:spcAft>
-                <a:spcPts val="600"/>
-              </a:spcAft>
-            </a:pPr>
-            <a:r>
-              <a:rPr sz="1500">
-                <a:solidFill>
-                  <a:srgbClr val="22282E"/>
-                </a:solidFill>
-              </a:rPr>
-              <a:t>•  Criterio de aceptación: (a) la imagen final usa multi-stage y base mínima/distroless y corre</a:t>
-            </a:r>
-          </a:p>
-          <a:p>
-            <a:pPr>
-              <a:spcAft>
-                <a:spcPts val="600"/>
-              </a:spcAft>
-            </a:pPr>
-            <a:r>
-              <a:rPr sz="1500">
-                <a:solidFill>
-                  <a:srgbClr val="22282E"/>
-                </a:solidFill>
-              </a:rPr>
-              <a:t>•  como no-root; (b) hadolint no reporta errores; (c) Trivy no reporta CVE CRITICAL y el gate falla</a:t>
-            </a:r>
-          </a:p>
-          <a:p>
-            <a:pPr>
-              <a:spcAft>
-                <a:spcPts val="600"/>
-              </a:spcAft>
-            </a:pPr>
-            <a:r>
-              <a:rPr sz="1500">
-                <a:solidFill>
-                  <a:srgbClr val="22282E"/>
-                </a:solidFill>
-              </a:rPr>
-              <a:t>•  si aparecen; (d) la imagen se firma con cosign y la firma se verifica; y (e) se genera y publica</a:t>
-            </a:r>
-          </a:p>
-          <a:p>
-            <a:pPr>
-              <a:spcAft>
-                <a:spcPts val="600"/>
-              </a:spcAft>
-            </a:pPr>
-            <a:r>
-              <a:rPr sz="1500">
-                <a:solidFill>
-                  <a:srgbClr val="22282E"/>
-                </a:solidFill>
-              </a:rPr>
-              <a:t>•  un SBOM de la imagen.</a:t>
+              <a:t>•  Docker/BuildKit o buildah para construir.</a:t>
+            </a:r>
+          </a:p>
+          <a:p>
+            <a:pPr>
+              <a:spcAft>
+                <a:spcPts val="600"/>
+              </a:spcAft>
+            </a:pPr>
+            <a:r>
+              <a:rPr sz="1500">
+                <a:solidFill>
+                  <a:srgbClr val="22282E"/>
+                </a:solidFill>
+              </a:rPr>
+              <a:t>•  Trivy para escanear imágenes.</a:t>
+            </a:r>
+          </a:p>
+          <a:p>
+            <a:pPr>
+              <a:spcAft>
+                <a:spcPts val="600"/>
+              </a:spcAft>
+            </a:pPr>
+            <a:r>
+              <a:rPr sz="1500">
+                <a:solidFill>
+                  <a:srgbClr val="22282E"/>
+                </a:solidFill>
+              </a:rPr>
+              <a:t>•  hadolint para lintar Dockerfiles.</a:t>
+            </a:r>
+          </a:p>
+          <a:p>
+            <a:pPr>
+              <a:spcAft>
+                <a:spcPts val="600"/>
+              </a:spcAft>
+            </a:pPr>
+            <a:r>
+              <a:rPr sz="1500">
+                <a:solidFill>
+                  <a:srgbClr val="22282E"/>
+                </a:solidFill>
+              </a:rPr>
+              <a:t>•  cosign (Sigstore) para firmar y verificar.</a:t>
             </a:r>
           </a:p>
         </p:txBody>
